--- a/PHIL2220/PHIL2220-Spr2025/Locke 2025.pptx
+++ b/PHIL2220/PHIL2220-Spr2025/Locke 2025.pptx
@@ -244,7 +244,7 @@
           <a:p>
             <a:fld id="{617698D5-EB83-4786-BE60-D7A65B435150}" type="datetimeFigureOut">
               <a:rPr lang="en-US" smtClean="0"/>
-              <a:t>3/11/2025</a:t>
+              <a:t>3/7/2026</a:t>
             </a:fld>
             <a:endParaRPr lang="en-US"/>
           </a:p>
@@ -5971,7 +5971,7 @@
               <a:buChar char="-"/>
             </a:pPr>
             <a:r>
-              <a:rPr lang="en-US" altLang="en-US" sz="2300" i="1" dirty="0">
+              <a:rPr lang="en-US" altLang="en-US" sz="2300" i="1">
                 <a:solidFill>
                   <a:schemeClr val="bg1"/>
                 </a:solidFill>
@@ -5981,6 +5981,16 @@
               <a:t>earliest</a:t>
             </a:r>
             <a:r>
+              <a:rPr lang="en-US" altLang="en-US" sz="2300">
+                <a:solidFill>
+                  <a:schemeClr val="bg1"/>
+                </a:solidFill>
+                <a:latin typeface="Calibri" panose="020F0502020204030204" pitchFamily="34" charset="0"/>
+                <a:cs typeface="Calibri" panose="020F0502020204030204" pitchFamily="34" charset="0"/>
+              </a:rPr>
+              <a:t> – in </a:t>
+            </a:r>
+            <a:r>
               <a:rPr lang="en-US" altLang="en-US" sz="2300" dirty="0">
                 <a:solidFill>
                   <a:schemeClr val="bg1"/>
@@ -5988,7 +5998,7 @@
                 <a:latin typeface="Calibri" panose="020F0502020204030204" pitchFamily="34" charset="0"/>
                 <a:cs typeface="Calibri" panose="020F0502020204030204" pitchFamily="34" charset="0"/>
               </a:rPr>
-              <a:t> –in our minds before other knowledge</a:t>
+              <a:t>our minds before other knowledge</a:t>
             </a:r>
           </a:p>
           <a:p>
